--- a/public/retrieval-picture-prompts-template.pptx
+++ b/public/retrieval-picture-prompts-template.pptx
@@ -2,13 +2,13 @@
 <file path=ppt/presentation.xml><?xml version="1.0" encoding="utf-8"?>
 <p:presentation xmlns:p="http://schemas.openxmlformats.org/presentationml/2006/main">
   <p:sldMasterIdLst>
-    <p:sldMasterId xmlns:r="http://schemas.openxmlformats.org/officeDocument/2006/relationships" id="2147483648" r:id="Rbc7b089d0f004bc5"/>
+    <p:sldMasterId xmlns:r="http://schemas.openxmlformats.org/officeDocument/2006/relationships" id="2147483648" r:id="R94b115548558406a"/>
   </p:sldMasterIdLst>
   <p:notesMasterIdLst>
-    <p:notesMasterId xmlns:r="http://schemas.openxmlformats.org/officeDocument/2006/relationships" r:id="Rc440196409394048"/>
+    <p:notesMasterId xmlns:r="http://schemas.openxmlformats.org/officeDocument/2006/relationships" r:id="R822ab033da714fbb"/>
   </p:notesMasterIdLst>
   <p:sldIdLst>
-    <p:sldId xmlns:r="http://schemas.openxmlformats.org/officeDocument/2006/relationships" id="256" r:id="R8eef51a66daf47a6"/>
+    <p:sldId xmlns:r="http://schemas.openxmlformats.org/officeDocument/2006/relationships" id="256" r:id="R868006a15e9c4423"/>
   </p:sldIdLst>
   <p:sldSz cx="12192000" cy="6858000"/>
   <p:notesSz cx="6858000" cy="9144000"/>
@@ -442,7 +442,7 @@
           <a:lstStyle xmlns:a="http://schemas.openxmlformats.org/drawingml/2006/main"/>
           <a:p xmlns:a="http://schemas.openxmlformats.org/drawingml/2006/main">
             <a:r>
-              <a:t>Teacher setup: Replace bracketed text before teaching. Every text box is editable. Duplicate the slide for checked answers or a second prompt. Keep prompt and answer sides separate when printing cards.</a:t>
+              <a:t>Teacher setup: Replace bracketed text before teaching. All text and shapes are editable. Duplicate the slide for answers or another prompt. For card activities, separate prompt and answer sides before printing.</a:t>
             </a:r>
           </a:p>
           <a:p xmlns:a="http://schemas.openxmlformats.org/drawingml/2006/main">
@@ -452,17 +452,12 @@
           </a:p>
           <a:p xmlns:a="http://schemas.openxmlformats.org/drawingml/2006/main">
             <a:r>
-              <a:t>Activity: Picture prompts</a:t>
-            </a:r>
-          </a:p>
-          <a:p xmlns:a="http://schemas.openxmlformats.org/drawingml/2006/main">
-            <a:r>
               <a:t>Materials: A relevant image with answer labels hidden</a:t>
             </a:r>
           </a:p>
           <a:p xmlns:a="http://schemas.openxmlformats.org/drawingml/2006/main">
             <a:r>
-              <a:t>Suggested total time including feedback: 6 minutes.</a:t>
+              <a:t>Suggested time including feedback: 6 minutes.</a:t>
             </a:r>
           </a:p>
           <a:p xmlns:a="http://schemas.openxmlformats.org/drawingml/2006/main">
@@ -505,26 +500,6 @@
               <a:t>Adapt: Provide a verbal description or accessible alternative to the image.</a:t>
             </a:r>
           </a:p>
-          <a:p xmlns:a="http://schemas.openxmlformats.org/drawingml/2006/main">
-            <a:r>
-              <a:t>Credit: Shared visual-cue method; TNT classroom adaptation</a:t>
-            </a:r>
-          </a:p>
-          <a:p xmlns:a="http://schemas.openxmlformats.org/drawingml/2006/main">
-            <a:r>
-              <a:t>No single originator is verified for this broad routine. The link supports retrieval principles rather than establishing ownership of picture prompts.</a:t>
-            </a:r>
-          </a:p>
-          <a:p xmlns:a="http://schemas.openxmlformats.org/drawingml/2006/main">
-            <a:r>
-              <a:t>Source: https://pdf.retrievalpractice.org/RetrievalPracticeGuide.pdf</a:t>
-            </a:r>
-          </a:p>
-          <a:p xmlns:a="http://schemas.openxmlformats.org/drawingml/2006/main">
-            <a:r>
-              <a:t>Full guide: https://tnt-teaching-tools.github.io/cold-call-classroom/retrieval-picture-prompts.html</a:t>
-            </a:r>
-          </a:p>
         </p:txBody>
       </p:sp>
       <p:sp>
@@ -569,7 +544,7 @@
           <p:cNvPr id="4" name="Accent rule">
             <a:extLst xmlns:a="http://schemas.openxmlformats.org/drawingml/2006/main">
               <a:ext uri="{FF2B5EF4-FFF2-40B4-BE49-F238E27FC236}">
-                <a16:creationId xmlns:a16="http://schemas.microsoft.com/office/drawing/2014/main" id="{5E7C1A9B-CABD-4A46-B969-C1A3E3F687BA}"/>
+                <a16:creationId xmlns:a16="http://schemas.microsoft.com/office/drawing/2014/main" id="{B36816A6-9471-45E2-9767-86CC7DDE5A9A}"/>
               </a:ext>
             </a:extLst>
           </p:cNvPr>
@@ -600,7 +575,7 @@
           <p:cNvPr id="2" name="Title">
             <a:extLst xmlns:a="http://schemas.openxmlformats.org/drawingml/2006/main">
               <a:ext uri="{FF2B5EF4-FFF2-40B4-BE49-F238E27FC236}">
-                <a16:creationId xmlns:a16="http://schemas.microsoft.com/office/drawing/2014/main" id="{6D9B19FE-443E-42E5-A58B-9C8BEE810378}"/>
+                <a16:creationId xmlns:a16="http://schemas.microsoft.com/office/drawing/2014/main" id="{59CDE0CA-7FAB-45BE-BBB3-6EA18712174E}"/>
               </a:ext>
             </a:extLst>
           </p:cNvPr>
@@ -747,7 +722,7 @@
           <p:cNvPr id="3" name="Subtitle">
             <a:extLst xmlns:a="http://schemas.openxmlformats.org/drawingml/2006/main">
               <a:ext uri="{FF2B5EF4-FFF2-40B4-BE49-F238E27FC236}">
-                <a16:creationId xmlns:a16="http://schemas.microsoft.com/office/drawing/2014/main" id="{776DDA6A-4900-4FE4-A3EE-683DF5EC7825}"/>
+                <a16:creationId xmlns:a16="http://schemas.microsoft.com/office/drawing/2014/main" id="{6DB82491-70FB-4EA4-B8ED-891B4DBD34B7}"/>
               </a:ext>
             </a:extLst>
           </p:cNvPr>
@@ -911,7 +886,7 @@
           <p:cNvPr id="3" name="Accent rule">
             <a:extLst xmlns:a="http://schemas.openxmlformats.org/drawingml/2006/main">
               <a:ext uri="{FF2B5EF4-FFF2-40B4-BE49-F238E27FC236}">
-                <a16:creationId xmlns:a16="http://schemas.microsoft.com/office/drawing/2014/main" id="{4016B658-8B90-40EF-8FC1-DB6626CF209B}"/>
+                <a16:creationId xmlns:a16="http://schemas.microsoft.com/office/drawing/2014/main" id="{12E6F6AC-FA21-4400-A2F5-854C6C4F7082}"/>
               </a:ext>
             </a:extLst>
           </p:cNvPr>
@@ -942,7 +917,7 @@
           <p:cNvPr id="2" name="Section title">
             <a:extLst xmlns:a="http://schemas.openxmlformats.org/drawingml/2006/main">
               <a:ext uri="{FF2B5EF4-FFF2-40B4-BE49-F238E27FC236}">
-                <a16:creationId xmlns:a16="http://schemas.microsoft.com/office/drawing/2014/main" id="{6AA7E435-EC52-4DCF-B81D-DC2CC216953D}"/>
+                <a16:creationId xmlns:a16="http://schemas.microsoft.com/office/drawing/2014/main" id="{1EF78C8B-CD20-48AD-A824-213BB90A13DB}"/>
               </a:ext>
             </a:extLst>
           </p:cNvPr>
@@ -1106,7 +1081,7 @@
           <p:cNvPr id="4" name="Accent rule">
             <a:extLst xmlns:a="http://schemas.openxmlformats.org/drawingml/2006/main">
               <a:ext uri="{FF2B5EF4-FFF2-40B4-BE49-F238E27FC236}">
-                <a16:creationId xmlns:a16="http://schemas.microsoft.com/office/drawing/2014/main" id="{4DB8DC6D-E6CF-4471-A4FE-3A77A4E514AA}"/>
+                <a16:creationId xmlns:a16="http://schemas.microsoft.com/office/drawing/2014/main" id="{01FA48EF-0169-46F8-9DDF-E2FE78246DD3}"/>
               </a:ext>
             </a:extLst>
           </p:cNvPr>
@@ -1137,7 +1112,7 @@
           <p:cNvPr id="2" name="Title">
             <a:extLst xmlns:a="http://schemas.openxmlformats.org/drawingml/2006/main">
               <a:ext uri="{FF2B5EF4-FFF2-40B4-BE49-F238E27FC236}">
-                <a16:creationId xmlns:a16="http://schemas.microsoft.com/office/drawing/2014/main" id="{76A4BB23-271B-4719-8F61-2F36C717CFD2}"/>
+                <a16:creationId xmlns:a16="http://schemas.microsoft.com/office/drawing/2014/main" id="{9B46916C-C2F3-4D01-8633-37108EAE0835}"/>
               </a:ext>
             </a:extLst>
           </p:cNvPr>
@@ -1284,7 +1259,7 @@
           <p:cNvPr id="3" name="Body">
             <a:extLst xmlns:a="http://schemas.openxmlformats.org/drawingml/2006/main">
               <a:ext uri="{FF2B5EF4-FFF2-40B4-BE49-F238E27FC236}">
-                <a16:creationId xmlns:a16="http://schemas.microsoft.com/office/drawing/2014/main" id="{9CD72F77-2452-4F06-824A-8549FC2B4A33}"/>
+                <a16:creationId xmlns:a16="http://schemas.microsoft.com/office/drawing/2014/main" id="{F27CA6E7-4B2A-4C53-B3A4-D5956FE5A4A8}"/>
               </a:ext>
             </a:extLst>
           </p:cNvPr>
@@ -1448,7 +1423,7 @@
           <p:cNvPr id="5" name="Accent rule">
             <a:extLst xmlns:a="http://schemas.openxmlformats.org/drawingml/2006/main">
               <a:ext uri="{FF2B5EF4-FFF2-40B4-BE49-F238E27FC236}">
-                <a16:creationId xmlns:a16="http://schemas.microsoft.com/office/drawing/2014/main" id="{6AB5ED25-D09B-467D-8816-B12B85AACB78}"/>
+                <a16:creationId xmlns:a16="http://schemas.microsoft.com/office/drawing/2014/main" id="{C8338740-E645-46EC-A28F-AE2F657BCD82}"/>
               </a:ext>
             </a:extLst>
           </p:cNvPr>
@@ -1479,7 +1454,7 @@
           <p:cNvPr id="2" name="Title">
             <a:extLst xmlns:a="http://schemas.openxmlformats.org/drawingml/2006/main">
               <a:ext uri="{FF2B5EF4-FFF2-40B4-BE49-F238E27FC236}">
-                <a16:creationId xmlns:a16="http://schemas.microsoft.com/office/drawing/2014/main" id="{0B7A9E1E-A4ED-46DD-A450-12385C892B34}"/>
+                <a16:creationId xmlns:a16="http://schemas.microsoft.com/office/drawing/2014/main" id="{655BA0A7-45EA-4E26-83EF-66B6698EDF0B}"/>
               </a:ext>
             </a:extLst>
           </p:cNvPr>
@@ -1626,7 +1601,7 @@
           <p:cNvPr id="3" name="Left column">
             <a:extLst xmlns:a="http://schemas.openxmlformats.org/drawingml/2006/main">
               <a:ext uri="{FF2B5EF4-FFF2-40B4-BE49-F238E27FC236}">
-                <a16:creationId xmlns:a16="http://schemas.microsoft.com/office/drawing/2014/main" id="{2A2C8AE1-4D70-4D97-937E-53CCFB23104C}"/>
+                <a16:creationId xmlns:a16="http://schemas.microsoft.com/office/drawing/2014/main" id="{4F687DB7-0135-4CF4-87F8-4131F5ACD965}"/>
               </a:ext>
             </a:extLst>
           </p:cNvPr>
@@ -1773,7 +1748,7 @@
           <p:cNvPr id="4" name="Right column">
             <a:extLst xmlns:a="http://schemas.openxmlformats.org/drawingml/2006/main">
               <a:ext uri="{FF2B5EF4-FFF2-40B4-BE49-F238E27FC236}">
-                <a16:creationId xmlns:a16="http://schemas.microsoft.com/office/drawing/2014/main" id="{1DDA8EE1-CEF1-40A4-ACE7-CAE60974E0F9}"/>
+                <a16:creationId xmlns:a16="http://schemas.microsoft.com/office/drawing/2014/main" id="{DFED5F7C-DA6B-4EDD-B0C5-A539B900BD14}"/>
               </a:ext>
             </a:extLst>
           </p:cNvPr>
@@ -1937,7 +1912,7 @@
           <p:cNvPr id="4" name="Accent rule">
             <a:extLst xmlns:a="http://schemas.openxmlformats.org/drawingml/2006/main">
               <a:ext uri="{FF2B5EF4-FFF2-40B4-BE49-F238E27FC236}">
-                <a16:creationId xmlns:a16="http://schemas.microsoft.com/office/drawing/2014/main" id="{D742B5B5-0EC0-4F16-8DFA-189A8D41AA24}"/>
+                <a16:creationId xmlns:a16="http://schemas.microsoft.com/office/drawing/2014/main" id="{5E3254A5-541B-49B8-BA2C-8E0A76BAAFE5}"/>
               </a:ext>
             </a:extLst>
           </p:cNvPr>
@@ -1968,7 +1943,7 @@
           <p:cNvPr id="2" name="Title">
             <a:extLst xmlns:a="http://schemas.openxmlformats.org/drawingml/2006/main">
               <a:ext uri="{FF2B5EF4-FFF2-40B4-BE49-F238E27FC236}">
-                <a16:creationId xmlns:a16="http://schemas.microsoft.com/office/drawing/2014/main" id="{D677F1A2-EE27-407D-9737-ED4C8D15EE42}"/>
+                <a16:creationId xmlns:a16="http://schemas.microsoft.com/office/drawing/2014/main" id="{40389442-D3B3-49F3-8E27-71A5E863163F}"/>
               </a:ext>
             </a:extLst>
           </p:cNvPr>
@@ -2115,7 +2090,7 @@
           <p:cNvPr id="3" name="Left column">
             <a:extLst xmlns:a="http://schemas.openxmlformats.org/drawingml/2006/main">
               <a:ext uri="{FF2B5EF4-FFF2-40B4-BE49-F238E27FC236}">
-                <a16:creationId xmlns:a16="http://schemas.microsoft.com/office/drawing/2014/main" id="{C7DB3A3D-4863-4572-B990-92449E9EBA18}"/>
+                <a16:creationId xmlns:a16="http://schemas.microsoft.com/office/drawing/2014/main" id="{0639A11A-A5F7-40F6-A280-2C6D276886D5}"/>
               </a:ext>
             </a:extLst>
           </p:cNvPr>
@@ -2300,12 +2275,12 @@
   </p:cSld>
   <p:clrMap bg1="lt1" tx1="dk1" bg2="lt2" tx2="dk2" accent1="accent1" accent2="accent2" accent3="accent3" accent4="accent4" accent5="accent5" accent6="accent6" hlink="hlink" folHlink="folHlink"/>
   <p:sldLayoutIdLst>
-    <p:sldLayoutId xmlns:r="http://schemas.openxmlformats.org/officeDocument/2006/relationships" id="2147483649" r:id="R07169d5ad6354df6"/>
-    <p:sldLayoutId xmlns:r="http://schemas.openxmlformats.org/officeDocument/2006/relationships" id="2147483650" r:id="Rd2d2cf276ef6465f"/>
-    <p:sldLayoutId xmlns:r="http://schemas.openxmlformats.org/officeDocument/2006/relationships" id="2147483651" r:id="R7858a23a0c654325"/>
-    <p:sldLayoutId xmlns:r="http://schemas.openxmlformats.org/officeDocument/2006/relationships" id="2147483652" r:id="Rf460ed11870d4f6c"/>
-    <p:sldLayoutId xmlns:r="http://schemas.openxmlformats.org/officeDocument/2006/relationships" id="2147483653" r:id="R49d6c74bbb134555"/>
-    <p:sldLayoutId xmlns:r="http://schemas.openxmlformats.org/officeDocument/2006/relationships" id="2147483654" r:id="R48c4508df3e14b6f"/>
+    <p:sldLayoutId xmlns:r="http://schemas.openxmlformats.org/officeDocument/2006/relationships" id="2147483649" r:id="Re6c6f94acf7b45d1"/>
+    <p:sldLayoutId xmlns:r="http://schemas.openxmlformats.org/officeDocument/2006/relationships" id="2147483650" r:id="Rc636519058184ba1"/>
+    <p:sldLayoutId xmlns:r="http://schemas.openxmlformats.org/officeDocument/2006/relationships" id="2147483651" r:id="Rf4cc0d1c5fe04be6"/>
+    <p:sldLayoutId xmlns:r="http://schemas.openxmlformats.org/officeDocument/2006/relationships" id="2147483652" r:id="Rd407fc4d618b4ecb"/>
+    <p:sldLayoutId xmlns:r="http://schemas.openxmlformats.org/officeDocument/2006/relationships" id="2147483653" r:id="R4af79f5ec1ad4c7e"/>
+    <p:sldLayoutId xmlns:r="http://schemas.openxmlformats.org/officeDocument/2006/relationships" id="2147483654" r:id="Rdd077b4a33d149c1"/>
   </p:sldLayoutIdLst>
   <p:txStyles>
     <p:titleStyle>
@@ -2838,7 +2813,7 @@
     <p:bg>
       <p:bgPr>
         <a:solidFill xmlns:a="http://schemas.openxmlformats.org/drawingml/2006/main">
-          <a:srgbClr val="FFFCF2"/>
+          <a:srgbClr val="FFFDF5"/>
         </a:solidFill>
       </p:bgPr>
     </p:bg>
@@ -2853,10 +2828,10 @@
       </p:grpSpPr>
       <p:sp>
         <p:nvSpPr>
-          <p:cNvPr id="8" name="">
+          <p:cNvPr id="19" name="">
             <a:extLst xmlns:a="http://schemas.openxmlformats.org/drawingml/2006/main">
               <a:ext uri="{FF2B5EF4-FFF2-40B4-BE49-F238E27FC236}">
-                <a16:creationId xmlns:a16="http://schemas.microsoft.com/office/drawing/2014/main" id="{D7191A0B-5D98-4A30-BFAC-BF38D9582923}"/>
+                <a16:creationId xmlns:a16="http://schemas.microsoft.com/office/drawing/2014/main" id="{6F90CEB6-1801-4701-B64E-76F7A1489925}"/>
               </a:ext>
             </a:extLst>
           </p:cNvPr>
@@ -2867,8 +2842,8 @@
         </p:nvSpPr>
         <p:spPr>
           <a:xfrm xmlns:a="http://schemas.openxmlformats.org/drawingml/2006/main">
-            <a:off x="609600" y="333375"/>
-            <a:ext cx="10972800" cy="714375"/>
+            <a:off x="609600" y="323850"/>
+            <a:ext cx="10972800" cy="666750"/>
           </a:xfrm>
           <a:prstGeom xmlns:a="http://schemas.openxmlformats.org/drawingml/2006/main" prst="rect">
             <a:avLst/>
@@ -2885,23 +2860,23 @@
           <a:lstStyle xmlns:a="http://schemas.openxmlformats.org/drawingml/2006/main"/>
           <a:p xmlns:a="http://schemas.openxmlformats.org/drawingml/2006/main">
             <a:pPr>
-              <a:defRPr sz="4050" b="1">
+              <a:defRPr sz="3450" b="1">
                 <a:solidFill>
-                  <a:srgbClr val="242720"/>
+                  <a:srgbClr val="263C3A"/>
                 </a:solidFill>
-                <a:latin typeface="Arial"/>
-                <a:ea typeface="Arial"/>
-                <a:cs typeface="Arial"/>
+                <a:latin typeface="DejaVu Sans"/>
+                <a:ea typeface="DejaVu Sans"/>
+                <a:cs typeface="DejaVu Sans"/>
               </a:defRPr>
             </a:pPr>
             <a:r>
-              <a:rPr sz="4050" b="1">
+              <a:rPr sz="3450" b="1">
                 <a:solidFill>
-                  <a:srgbClr val="242720"/>
+                  <a:srgbClr val="263C3A"/>
                 </a:solidFill>
-                <a:latin typeface="Arial"/>
-                <a:ea typeface="Arial"/>
-                <a:cs typeface="Arial"/>
+                <a:latin typeface="DejaVu Sans"/>
+                <a:ea typeface="DejaVu Sans"/>
+                <a:cs typeface="DejaVu Sans"/>
               </a:rPr>
               <a:t>Picture prompts</a:t>
             </a:r>
@@ -2913,7 +2888,7 @@
           <p:cNvPr id="2" name="">
             <a:extLst xmlns:a="http://schemas.openxmlformats.org/drawingml/2006/main">
               <a:ext uri="{FF2B5EF4-FFF2-40B4-BE49-F238E27FC236}">
-                <a16:creationId xmlns:a16="http://schemas.microsoft.com/office/drawing/2014/main" id="{42997D44-70C7-45F6-84EA-17E1919D289D}"/>
+                <a16:creationId xmlns:a16="http://schemas.microsoft.com/office/drawing/2014/main" id="{8C8A3583-ADD8-4C60-BEB4-009E55E5E42C}"/>
               </a:ext>
             </a:extLst>
           </p:cNvPr>
@@ -2924,8 +2899,8 @@
         </p:nvSpPr>
         <p:spPr>
           <a:xfrm xmlns:a="http://schemas.openxmlformats.org/drawingml/2006/main">
-            <a:off x="609600" y="1190625"/>
-            <a:ext cx="10972800" cy="476250"/>
+            <a:off x="609600" y="1085850"/>
+            <a:ext cx="10972800" cy="409575"/>
           </a:xfrm>
           <a:prstGeom xmlns:a="http://schemas.openxmlformats.org/drawingml/2006/main" prst="rect">
             <a:avLst/>
@@ -2942,25 +2917,25 @@
           <a:lstStyle xmlns:a="http://schemas.openxmlformats.org/drawingml/2006/main"/>
           <a:p xmlns:a="http://schemas.openxmlformats.org/drawingml/2006/main">
             <a:pPr>
-              <a:defRPr sz="2400" b="0">
+              <a:defRPr sz="2175" b="0">
                 <a:solidFill>
-                  <a:srgbClr val="242720"/>
+                  <a:srgbClr val="687572"/>
                 </a:solidFill>
-                <a:latin typeface="Arial"/>
-                <a:ea typeface="Arial"/>
-                <a:cs typeface="Arial"/>
+                <a:latin typeface="DejaVu Sans"/>
+                <a:ea typeface="DejaVu Sans"/>
+                <a:cs typeface="DejaVu Sans"/>
               </a:defRPr>
             </a:pPr>
             <a:r>
-              <a:rPr sz="2400" b="0">
+              <a:rPr sz="2175" b="0">
                 <a:solidFill>
-                  <a:srgbClr val="242720"/>
+                  <a:srgbClr val="687572"/>
                 </a:solidFill>
-                <a:latin typeface="Arial"/>
-                <a:ea typeface="Arial"/>
-                <a:cs typeface="Arial"/>
+                <a:latin typeface="DejaVu Sans"/>
+                <a:ea typeface="DejaVu Sans"/>
+                <a:cs typeface="DejaVu Sans"/>
               </a:rPr>
-              <a:t>[Add your topic or retrieval focus]</a:t>
+              <a:t>[Your topic or retrieval focus]</a:t>
             </a:r>
           </a:p>
         </p:txBody>
@@ -2970,7 +2945,7 @@
           <p:cNvPr id="3" name="">
             <a:extLst xmlns:a="http://schemas.openxmlformats.org/drawingml/2006/main">
               <a:ext uri="{FF2B5EF4-FFF2-40B4-BE49-F238E27FC236}">
-                <a16:creationId xmlns:a16="http://schemas.microsoft.com/office/drawing/2014/main" id="{A30B0019-6BD2-41CF-979C-F0EBD5806D4A}"/>
+                <a16:creationId xmlns:a16="http://schemas.microsoft.com/office/drawing/2014/main" id="{972D1251-EB64-4A2E-B3C1-DC36C39438C5}"/>
               </a:ext>
             </a:extLst>
           </p:cNvPr>
@@ -2981,8 +2956,38 @@
         </p:nvSpPr>
         <p:spPr>
           <a:xfrm xmlns:a="http://schemas.openxmlformats.org/drawingml/2006/main">
-            <a:off x="609600" y="1733550"/>
-            <a:ext cx="10972800" cy="400050"/>
+            <a:off x="609600" y="1676400"/>
+            <a:ext cx="10972800" cy="19050"/>
+          </a:xfrm>
+          <a:prstGeom xmlns:a="http://schemas.openxmlformats.org/drawingml/2006/main" prst="rect">
+            <a:avLst/>
+          </a:prstGeom>
+          <a:solidFill xmlns:a="http://schemas.openxmlformats.org/drawingml/2006/main">
+            <a:srgbClr val="A9BDB7"/>
+          </a:solidFill>
+          <a:ln xmlns:a="http://schemas.openxmlformats.org/drawingml/2006/main" w="0">
+            <a:noFill/>
+          </a:ln>
+        </p:spPr>
+      </p:sp>
+      <p:sp>
+        <p:nvSpPr>
+          <p:cNvPr id="4" name="">
+            <a:extLst xmlns:a="http://schemas.openxmlformats.org/drawingml/2006/main">
+              <a:ext uri="{FF2B5EF4-FFF2-40B4-BE49-F238E27FC236}">
+                <a16:creationId xmlns:a16="http://schemas.microsoft.com/office/drawing/2014/main" id="{8289D6B3-A6AF-48C1-AA91-FF51B1E9B1AE}"/>
+              </a:ext>
+            </a:extLst>
+          </p:cNvPr>
+          <p:cNvSpPr>
+            <a:spLocks xmlns:a="http://schemas.openxmlformats.org/drawingml/2006/main" noGrp="1"/>
+          </p:cNvSpPr>
+          <p:nvPr/>
+        </p:nvSpPr>
+        <p:spPr>
+          <a:xfrm xmlns:a="http://schemas.openxmlformats.org/drawingml/2006/main">
+            <a:off x="609600" y="1828800"/>
+            <a:ext cx="4476750" cy="304800"/>
           </a:xfrm>
           <a:prstGeom xmlns:a="http://schemas.openxmlformats.org/drawingml/2006/main" prst="rect">
             <a:avLst/>
@@ -2999,35 +3004,35 @@
           <a:lstStyle xmlns:a="http://schemas.openxmlformats.org/drawingml/2006/main"/>
           <a:p xmlns:a="http://schemas.openxmlformats.org/drawingml/2006/main">
             <a:pPr>
-              <a:defRPr sz="1800" b="0">
+              <a:defRPr sz="1575" b="1">
                 <a:solidFill>
-                  <a:srgbClr val="28534A"/>
+                  <a:srgbClr val="263C3A"/>
                 </a:solidFill>
-                <a:latin typeface="Arial"/>
-                <a:ea typeface="Arial"/>
-                <a:cs typeface="Arial"/>
+                <a:latin typeface="DejaVu Sans"/>
+                <a:ea typeface="DejaVu Sans"/>
+                <a:cs typeface="DejaVu Sans"/>
               </a:defRPr>
             </a:pPr>
             <a:r>
-              <a:rPr sz="1800" b="0">
+              <a:rPr sz="1575" b="1">
                 <a:solidFill>
-                  <a:srgbClr val="28534A"/>
+                  <a:srgbClr val="263C3A"/>
                 </a:solidFill>
-                <a:latin typeface="Arial"/>
-                <a:ea typeface="Arial"/>
-                <a:cs typeface="Arial"/>
+                <a:latin typeface="DejaVu Sans"/>
+                <a:ea typeface="DejaVu Sans"/>
+                <a:cs typeface="DejaVu Sans"/>
               </a:rPr>
-              <a:t>Recall independently first. Check and improve after feedback.</a:t>
+              <a:t>01  Recall from memory</a:t>
             </a:r>
           </a:p>
         </p:txBody>
       </p:sp>
       <p:sp>
         <p:nvSpPr>
-          <p:cNvPr id="4" name="">
+          <p:cNvPr id="5" name="">
             <a:extLst xmlns:a="http://schemas.openxmlformats.org/drawingml/2006/main">
               <a:ext uri="{FF2B5EF4-FFF2-40B4-BE49-F238E27FC236}">
-                <a16:creationId xmlns:a16="http://schemas.microsoft.com/office/drawing/2014/main" id="{1D107434-48A8-4B1B-A1F8-86B44747C8B3}"/>
+                <a16:creationId xmlns:a16="http://schemas.microsoft.com/office/drawing/2014/main" id="{BD218356-CBEB-46B3-8FAB-18151BC59CDD}"/>
               </a:ext>
             </a:extLst>
           </p:cNvPr>
@@ -3038,177 +3043,8 @@
         </p:nvSpPr>
         <p:spPr>
           <a:xfrm xmlns:a="http://schemas.openxmlformats.org/drawingml/2006/main">
-            <a:off x="609600" y="2190750"/>
-            <a:ext cx="5400675" cy="3333750"/>
-          </a:xfrm>
-          <a:prstGeom xmlns:a="http://schemas.openxmlformats.org/drawingml/2006/main" prst="rect">
-            <a:avLst/>
-          </a:prstGeom>
-          <a:noFill xmlns:a="http://schemas.openxmlformats.org/drawingml/2006/main"/>
-          <a:ln xmlns:a="http://schemas.openxmlformats.org/drawingml/2006/main" w="9525">
-            <a:solidFill>
-              <a:srgbClr val="CBD0C4"/>
-            </a:solidFill>
-          </a:ln>
-        </p:spPr>
-        <p:txBody>
-          <a:bodyPr xmlns:a="http://schemas.openxmlformats.org/drawingml/2006/main" lIns="142875" tIns="114300" rIns="142875" bIns="0" anchor="t">
-            <a:noAutofit/>
-          </a:bodyPr>
-          <a:lstStyle xmlns:a="http://schemas.openxmlformats.org/drawingml/2006/main"/>
-          <a:p xmlns:a="http://schemas.openxmlformats.org/drawingml/2006/main">
-            <a:pPr>
-              <a:defRPr sz="1950" b="0">
-                <a:solidFill>
-                  <a:srgbClr val="42473D"/>
-                </a:solidFill>
-                <a:latin typeface="Arial"/>
-                <a:ea typeface="Arial"/>
-                <a:cs typeface="Arial"/>
-              </a:defRPr>
-            </a:pPr>
-            <a:r>
-              <a:rPr sz="1950" b="0">
-                <a:solidFill>
-                  <a:srgbClr val="42473D"/>
-                </a:solidFill>
-                <a:latin typeface="Arial"/>
-                <a:ea typeface="Arial"/>
-                <a:cs typeface="Arial"/>
-              </a:rPr>
-              <a:t>[Insert a familiar image]</a:t>
-            </a:r>
-          </a:p>
-          <a:p xmlns:a="http://schemas.openxmlformats.org/drawingml/2006/main">
-            <a:pPr>
-              <a:defRPr sz="1950" b="0">
-                <a:solidFill>
-                  <a:srgbClr val="42473D"/>
-                </a:solidFill>
-                <a:latin typeface="Arial"/>
-                <a:ea typeface="Arial"/>
-                <a:cs typeface="Arial"/>
-              </a:defRPr>
-            </a:pPr>
-            <a:r>
-              <a:rPr sz="1950" b="0">
-                <a:solidFill>
-                  <a:srgbClr val="42473D"/>
-                </a:solidFill>
-                <a:latin typeface="Arial"/>
-                <a:ea typeface="Arial"/>
-                <a:cs typeface="Arial"/>
-              </a:rPr>
-              <a:t>Hide answer labels before recall.</a:t>
-            </a:r>
-          </a:p>
-        </p:txBody>
-      </p:sp>
-      <p:sp>
-        <p:nvSpPr>
-          <p:cNvPr id="5" name="">
-            <a:extLst xmlns:a="http://schemas.openxmlformats.org/drawingml/2006/main">
-              <a:ext uri="{FF2B5EF4-FFF2-40B4-BE49-F238E27FC236}">
-                <a16:creationId xmlns:a16="http://schemas.microsoft.com/office/drawing/2014/main" id="{9FA0A64D-462B-4A21-AAB4-D469756DA1AF}"/>
-              </a:ext>
-            </a:extLst>
-          </p:cNvPr>
-          <p:cNvSpPr>
-            <a:spLocks xmlns:a="http://schemas.openxmlformats.org/drawingml/2006/main" noGrp="1"/>
-          </p:cNvSpPr>
-          <p:nvPr/>
-        </p:nvSpPr>
-        <p:spPr>
-          <a:xfrm xmlns:a="http://schemas.openxmlformats.org/drawingml/2006/main">
-            <a:off x="6181725" y="2190750"/>
-            <a:ext cx="5400675" cy="3333750"/>
-          </a:xfrm>
-          <a:prstGeom xmlns:a="http://schemas.openxmlformats.org/drawingml/2006/main" prst="rect">
-            <a:avLst/>
-          </a:prstGeom>
-          <a:noFill xmlns:a="http://schemas.openxmlformats.org/drawingml/2006/main"/>
-          <a:ln xmlns:a="http://schemas.openxmlformats.org/drawingml/2006/main" w="9525">
-            <a:solidFill>
-              <a:srgbClr val="CBD0C4"/>
-            </a:solidFill>
-          </a:ln>
-        </p:spPr>
-        <p:txBody>
-          <a:bodyPr xmlns:a="http://schemas.openxmlformats.org/drawingml/2006/main" lIns="142875" tIns="114300" rIns="142875" bIns="0" anchor="t">
-            <a:noAutofit/>
-          </a:bodyPr>
-          <a:lstStyle xmlns:a="http://schemas.openxmlformats.org/drawingml/2006/main"/>
-          <a:p xmlns:a="http://schemas.openxmlformats.org/drawingml/2006/main">
-            <a:pPr>
-              <a:defRPr sz="1950" b="0">
-                <a:solidFill>
-                  <a:srgbClr val="42473D"/>
-                </a:solidFill>
-                <a:latin typeface="Arial"/>
-                <a:ea typeface="Arial"/>
-                <a:cs typeface="Arial"/>
-              </a:defRPr>
-            </a:pPr>
-            <a:r>
-              <a:rPr sz="1950" b="0">
-                <a:solidFill>
-                  <a:srgbClr val="42473D"/>
-                </a:solidFill>
-                <a:latin typeface="Arial"/>
-                <a:ea typeface="Arial"/>
-                <a:cs typeface="Arial"/>
-              </a:rPr>
-              <a:t>[Add recall instructions]</a:t>
-            </a:r>
-          </a:p>
-          <a:p xmlns:a="http://schemas.openxmlformats.org/drawingml/2006/main">
-            <a:r>
-              <a:t/>
-            </a:r>
-          </a:p>
-          <a:p xmlns:a="http://schemas.openxmlformats.org/drawingml/2006/main">
-            <a:pPr>
-              <a:defRPr sz="1950" b="0">
-                <a:solidFill>
-                  <a:srgbClr val="42473D"/>
-                </a:solidFill>
-                <a:latin typeface="Arial"/>
-                <a:ea typeface="Arial"/>
-                <a:cs typeface="Arial"/>
-              </a:defRPr>
-            </a:pPr>
-            <a:r>
-              <a:rPr sz="1950" b="0">
-                <a:solidFill>
-                  <a:srgbClr val="42473D"/>
-                </a:solidFill>
-                <a:latin typeface="Arial"/>
-                <a:ea typeface="Arial"/>
-                <a:cs typeface="Arial"/>
-              </a:rPr>
-              <a:t>[Add checked labels or explanations to reveal later]</a:t>
-            </a:r>
-          </a:p>
-        </p:txBody>
-      </p:sp>
-      <p:sp>
-        <p:nvSpPr>
-          <p:cNvPr id="6" name="">
-            <a:extLst xmlns:a="http://schemas.openxmlformats.org/drawingml/2006/main">
-              <a:ext uri="{FF2B5EF4-FFF2-40B4-BE49-F238E27FC236}">
-                <a16:creationId xmlns:a16="http://schemas.microsoft.com/office/drawing/2014/main" id="{04D5587A-62A1-4229-ACE9-D37A1CC32F2F}"/>
-              </a:ext>
-            </a:extLst>
-          </p:cNvPr>
-          <p:cNvSpPr>
-            <a:spLocks xmlns:a="http://schemas.openxmlformats.org/drawingml/2006/main" noGrp="1"/>
-          </p:cNvSpPr>
-          <p:nvPr/>
-        </p:nvSpPr>
-        <p:spPr>
-          <a:xfrm xmlns:a="http://schemas.openxmlformats.org/drawingml/2006/main">
-            <a:off x="609600" y="5953125"/>
-            <a:ext cx="10972800" cy="381000"/>
+            <a:off x="6286500" y="1828800"/>
+            <a:ext cx="5048250" cy="304800"/>
           </a:xfrm>
           <a:prstGeom xmlns:a="http://schemas.openxmlformats.org/drawingml/2006/main" prst="rect">
             <a:avLst/>
@@ -3225,35 +3061,35 @@
           <a:lstStyle xmlns:a="http://schemas.openxmlformats.org/drawingml/2006/main"/>
           <a:p xmlns:a="http://schemas.openxmlformats.org/drawingml/2006/main">
             <a:pPr>
-              <a:defRPr sz="1800" b="0">
+              <a:defRPr sz="1575" b="1">
                 <a:solidFill>
-                  <a:srgbClr val="28534A"/>
+                  <a:srgbClr val="263C3A"/>
                 </a:solidFill>
-                <a:latin typeface="Arial"/>
-                <a:ea typeface="Arial"/>
-                <a:cs typeface="Arial"/>
+                <a:latin typeface="DejaVu Sans"/>
+                <a:ea typeface="DejaVu Sans"/>
+                <a:cs typeface="DejaVu Sans"/>
               </a:defRPr>
             </a:pPr>
             <a:r>
-              <a:rPr sz="1800" b="0">
+              <a:rPr sz="1575" b="1">
                 <a:solidFill>
-                  <a:srgbClr val="28534A"/>
+                  <a:srgbClr val="263C3A"/>
                 </a:solidFill>
-                <a:latin typeface="Arial"/>
-                <a:ea typeface="Arial"/>
-                <a:cs typeface="Arial"/>
+                <a:latin typeface="DejaVu Sans"/>
+                <a:ea typeface="DejaVu Sans"/>
+                <a:cs typeface="DejaVu Sans"/>
               </a:rPr>
-              <a:t>Time: [Add minutes]     Check: [Add your feedback routine]</a:t>
+              <a:t>02  Check and improve</a:t>
             </a:r>
           </a:p>
         </p:txBody>
       </p:sp>
       <p:sp>
         <p:nvSpPr>
-          <p:cNvPr id="7" name="">
+          <p:cNvPr id="6" name="">
             <a:extLst xmlns:a="http://schemas.openxmlformats.org/drawingml/2006/main">
               <a:ext uri="{FF2B5EF4-FFF2-40B4-BE49-F238E27FC236}">
-                <a16:creationId xmlns:a16="http://schemas.microsoft.com/office/drawing/2014/main" id="{39A920C3-871F-45C6-8AEA-A20980D9294D}"/>
+                <a16:creationId xmlns:a16="http://schemas.microsoft.com/office/drawing/2014/main" id="{71B07203-11C5-47A5-8BC1-8FA19AA887CF}"/>
               </a:ext>
             </a:extLst>
           </p:cNvPr>
@@ -3264,8 +3100,70 @@
         </p:nvSpPr>
         <p:spPr>
           <a:xfrm xmlns:a="http://schemas.openxmlformats.org/drawingml/2006/main">
-            <a:off x="609600" y="6534150"/>
-            <a:ext cx="10972800" cy="209550"/>
+            <a:off x="609600" y="2247900"/>
+            <a:ext cx="5400675" cy="3371850"/>
+          </a:xfrm>
+          <a:prstGeom xmlns:a="http://schemas.openxmlformats.org/drawingml/2006/main" prst="rect">
+            <a:avLst/>
+          </a:prstGeom>
+          <a:solidFill xmlns:a="http://schemas.openxmlformats.org/drawingml/2006/main">
+            <a:srgbClr val="EDF2F5"/>
+          </a:solidFill>
+          <a:ln xmlns:a="http://schemas.openxmlformats.org/drawingml/2006/main" w="9525">
+            <a:solidFill>
+              <a:srgbClr val="D4DFDB"/>
+            </a:solidFill>
+          </a:ln>
+        </p:spPr>
+      </p:sp>
+      <p:sp>
+        <p:nvSpPr>
+          <p:cNvPr id="7" name="">
+            <a:extLst xmlns:a="http://schemas.openxmlformats.org/drawingml/2006/main">
+              <a:ext uri="{FF2B5EF4-FFF2-40B4-BE49-F238E27FC236}">
+                <a16:creationId xmlns:a16="http://schemas.microsoft.com/office/drawing/2014/main" id="{942E21DA-5AD3-479C-9CB7-47257349A1B0}"/>
+              </a:ext>
+            </a:extLst>
+          </p:cNvPr>
+          <p:cNvSpPr>
+            <a:spLocks xmlns:a="http://schemas.openxmlformats.org/drawingml/2006/main" noGrp="1"/>
+          </p:cNvSpPr>
+          <p:nvPr/>
+        </p:nvSpPr>
+        <p:spPr>
+          <a:xfrm xmlns:a="http://schemas.openxmlformats.org/drawingml/2006/main">
+            <a:off x="800100" y="2419350"/>
+            <a:ext cx="381000" cy="381000"/>
+          </a:xfrm>
+          <a:prstGeom xmlns:a="http://schemas.openxmlformats.org/drawingml/2006/main" prst="ellipse">
+            <a:avLst/>
+          </a:prstGeom>
+          <a:solidFill xmlns:a="http://schemas.openxmlformats.org/drawingml/2006/main">
+            <a:srgbClr val="FFFFFF"/>
+          </a:solidFill>
+          <a:ln xmlns:a="http://schemas.openxmlformats.org/drawingml/2006/main" w="0">
+            <a:noFill/>
+          </a:ln>
+        </p:spPr>
+      </p:sp>
+      <p:sp>
+        <p:nvSpPr>
+          <p:cNvPr id="8" name="">
+            <a:extLst xmlns:a="http://schemas.openxmlformats.org/drawingml/2006/main">
+              <a:ext uri="{FF2B5EF4-FFF2-40B4-BE49-F238E27FC236}">
+                <a16:creationId xmlns:a16="http://schemas.microsoft.com/office/drawing/2014/main" id="{E7CC01EF-B202-48B7-B386-BF7324AB5EC9}"/>
+              </a:ext>
+            </a:extLst>
+          </p:cNvPr>
+          <p:cNvSpPr>
+            <a:spLocks xmlns:a="http://schemas.openxmlformats.org/drawingml/2006/main" noGrp="1"/>
+          </p:cNvSpPr>
+          <p:nvPr/>
+        </p:nvSpPr>
+        <p:spPr>
+          <a:xfrm xmlns:a="http://schemas.openxmlformats.org/drawingml/2006/main">
+            <a:off x="857250" y="2486025"/>
+            <a:ext cx="342900" cy="285750"/>
           </a:xfrm>
           <a:prstGeom xmlns:a="http://schemas.openxmlformats.org/drawingml/2006/main" prst="rect">
             <a:avLst/>
@@ -3282,33 +3180,524 @@
           <a:lstStyle xmlns:a="http://schemas.openxmlformats.org/drawingml/2006/main"/>
           <a:p xmlns:a="http://schemas.openxmlformats.org/drawingml/2006/main">
             <a:pPr>
-              <a:defRPr sz="1050" b="0">
+              <a:defRPr sz="1350" b="1">
                 <a:solidFill>
-                  <a:srgbClr val="62675C"/>
+                  <a:srgbClr val="263C3A"/>
                 </a:solidFill>
-                <a:latin typeface="Arial"/>
-                <a:ea typeface="Arial"/>
-                <a:cs typeface="Arial"/>
+                <a:latin typeface="DejaVu Sans"/>
+                <a:ea typeface="DejaVu Sans"/>
+                <a:cs typeface="DejaVu Sans"/>
               </a:defRPr>
             </a:pPr>
             <a:r>
-              <a:rPr sz="1050" b="0">
+              <a:rPr sz="1350" b="1">
                 <a:solidFill>
-                  <a:srgbClr val="62675C"/>
+                  <a:srgbClr val="263C3A"/>
                 </a:solidFill>
-                <a:latin typeface="Arial"/>
-                <a:ea typeface="Arial"/>
-                <a:cs typeface="Arial"/>
+                <a:latin typeface="DejaVu Sans"/>
+                <a:ea typeface="DejaVu Sans"/>
+                <a:cs typeface="DejaVu Sans"/>
               </a:rPr>
-              <a:t>TNT Teaching Tools   Editable classroom template   Source and teacher guidance in speaker notes</a:t>
+              <a:t>01</a:t>
             </a:r>
           </a:p>
         </p:txBody>
       </p:sp>
+      <p:sp>
+        <p:nvSpPr>
+          <p:cNvPr id="9" name="">
+            <a:extLst xmlns:a="http://schemas.openxmlformats.org/drawingml/2006/main">
+              <a:ext uri="{FF2B5EF4-FFF2-40B4-BE49-F238E27FC236}">
+                <a16:creationId xmlns:a16="http://schemas.microsoft.com/office/drawing/2014/main" id="{19F07B58-1D31-4817-B6CF-92720F053A29}"/>
+              </a:ext>
+            </a:extLst>
+          </p:cNvPr>
+          <p:cNvSpPr>
+            <a:spLocks xmlns:a="http://schemas.openxmlformats.org/drawingml/2006/main" noGrp="1"/>
+          </p:cNvSpPr>
+          <p:nvPr/>
+        </p:nvSpPr>
+        <p:spPr>
+          <a:xfrm xmlns:a="http://schemas.openxmlformats.org/drawingml/2006/main">
+            <a:off x="1352550" y="2466975"/>
+            <a:ext cx="4467225" cy="428625"/>
+          </a:xfrm>
+          <a:prstGeom xmlns:a="http://schemas.openxmlformats.org/drawingml/2006/main" prst="rect">
+            <a:avLst/>
+          </a:prstGeom>
+          <a:noFill xmlns:a="http://schemas.openxmlformats.org/drawingml/2006/main"/>
+          <a:ln xmlns:a="http://schemas.openxmlformats.org/drawingml/2006/main" w="0">
+            <a:noFill/>
+          </a:ln>
+        </p:spPr>
+        <p:txBody>
+          <a:bodyPr xmlns:a="http://schemas.openxmlformats.org/drawingml/2006/main" lIns="0" tIns="0" rIns="0" bIns="0" anchor="t">
+            <a:noAutofit/>
+          </a:bodyPr>
+          <a:lstStyle xmlns:a="http://schemas.openxmlformats.org/drawingml/2006/main"/>
+          <a:p xmlns:a="http://schemas.openxmlformats.org/drawingml/2006/main">
+            <a:pPr>
+              <a:defRPr sz="1725" b="1">
+                <a:solidFill>
+                  <a:srgbClr val="263C3A"/>
+                </a:solidFill>
+                <a:latin typeface="DejaVu Sans"/>
+                <a:ea typeface="DejaVu Sans"/>
+                <a:cs typeface="DejaVu Sans"/>
+              </a:defRPr>
+            </a:pPr>
+            <a:r>
+              <a:rPr sz="1725" b="1">
+                <a:solidFill>
+                  <a:srgbClr val="263C3A"/>
+                </a:solidFill>
+                <a:latin typeface="DejaVu Sans"/>
+                <a:ea typeface="DejaVu Sans"/>
+                <a:cs typeface="DejaVu Sans"/>
+              </a:rPr>
+              <a:t>Look and recall</a:t>
+            </a:r>
+          </a:p>
+        </p:txBody>
+      </p:sp>
+      <p:sp>
+        <p:nvSpPr>
+          <p:cNvPr id="10" name="">
+            <a:extLst xmlns:a="http://schemas.openxmlformats.org/drawingml/2006/main">
+              <a:ext uri="{FF2B5EF4-FFF2-40B4-BE49-F238E27FC236}">
+                <a16:creationId xmlns:a16="http://schemas.microsoft.com/office/drawing/2014/main" id="{E88C6AFA-BB03-41AE-BEC9-E178E8855AA5}"/>
+              </a:ext>
+            </a:extLst>
+          </p:cNvPr>
+          <p:cNvSpPr>
+            <a:spLocks xmlns:a="http://schemas.openxmlformats.org/drawingml/2006/main" noGrp="1"/>
+          </p:cNvSpPr>
+          <p:nvPr/>
+        </p:nvSpPr>
+        <p:spPr>
+          <a:xfrm xmlns:a="http://schemas.openxmlformats.org/drawingml/2006/main">
+            <a:off x="819150" y="2990850"/>
+            <a:ext cx="4981575" cy="2466975"/>
+          </a:xfrm>
+          <a:prstGeom xmlns:a="http://schemas.openxmlformats.org/drawingml/2006/main" prst="rect">
+            <a:avLst/>
+          </a:prstGeom>
+          <a:noFill xmlns:a="http://schemas.openxmlformats.org/drawingml/2006/main"/>
+          <a:ln xmlns:a="http://schemas.openxmlformats.org/drawingml/2006/main" w="0">
+            <a:noFill/>
+          </a:ln>
+        </p:spPr>
+        <p:txBody>
+          <a:bodyPr xmlns:a="http://schemas.openxmlformats.org/drawingml/2006/main" lIns="0" tIns="0" rIns="0" bIns="0" anchor="t">
+            <a:noAutofit/>
+          </a:bodyPr>
+          <a:lstStyle xmlns:a="http://schemas.openxmlformats.org/drawingml/2006/main"/>
+          <a:p xmlns:a="http://schemas.openxmlformats.org/drawingml/2006/main">
+            <a:pPr>
+              <a:defRPr sz="1950" b="0">
+                <a:solidFill>
+                  <a:srgbClr val="687572"/>
+                </a:solidFill>
+                <a:latin typeface="DejaVu Sans"/>
+                <a:ea typeface="DejaVu Sans"/>
+                <a:cs typeface="DejaVu Sans"/>
+              </a:defRPr>
+            </a:pPr>
+            <a:r>
+              <a:rPr sz="1950" b="0">
+                <a:solidFill>
+                  <a:srgbClr val="687572"/>
+                </a:solidFill>
+                <a:latin typeface="DejaVu Sans"/>
+                <a:ea typeface="DejaVu Sans"/>
+                <a:cs typeface="DejaVu Sans"/>
+              </a:rPr>
+              <a:t>[Insert a familiar image]</a:t>
+            </a:r>
+          </a:p>
+        </p:txBody>
+      </p:sp>
+      <p:sp>
+        <p:nvSpPr>
+          <p:cNvPr id="11" name="">
+            <a:extLst xmlns:a="http://schemas.openxmlformats.org/drawingml/2006/main">
+              <a:ext uri="{FF2B5EF4-FFF2-40B4-BE49-F238E27FC236}">
+                <a16:creationId xmlns:a16="http://schemas.microsoft.com/office/drawing/2014/main" id="{914EBEAE-EEC5-4604-BF0B-12972A816894}"/>
+              </a:ext>
+            </a:extLst>
+          </p:cNvPr>
+          <p:cNvSpPr>
+            <a:spLocks xmlns:a="http://schemas.openxmlformats.org/drawingml/2006/main" noGrp="1"/>
+          </p:cNvSpPr>
+          <p:nvPr/>
+        </p:nvSpPr>
+        <p:spPr>
+          <a:xfrm xmlns:a="http://schemas.openxmlformats.org/drawingml/2006/main">
+            <a:off x="6181725" y="2247900"/>
+            <a:ext cx="5400675" cy="3371850"/>
+          </a:xfrm>
+          <a:prstGeom xmlns:a="http://schemas.openxmlformats.org/drawingml/2006/main" prst="rect">
+            <a:avLst/>
+          </a:prstGeom>
+          <a:solidFill xmlns:a="http://schemas.openxmlformats.org/drawingml/2006/main">
+            <a:srgbClr val="EAF1EC"/>
+          </a:solidFill>
+          <a:ln xmlns:a="http://schemas.openxmlformats.org/drawingml/2006/main" w="9525">
+            <a:solidFill>
+              <a:srgbClr val="D4DFDB"/>
+            </a:solidFill>
+          </a:ln>
+        </p:spPr>
+      </p:sp>
+      <p:sp>
+        <p:nvSpPr>
+          <p:cNvPr id="12" name="">
+            <a:extLst xmlns:a="http://schemas.openxmlformats.org/drawingml/2006/main">
+              <a:ext uri="{FF2B5EF4-FFF2-40B4-BE49-F238E27FC236}">
+                <a16:creationId xmlns:a16="http://schemas.microsoft.com/office/drawing/2014/main" id="{13377ABA-D40F-4EB0-9527-7EDC2CB4263F}"/>
+              </a:ext>
+            </a:extLst>
+          </p:cNvPr>
+          <p:cNvSpPr>
+            <a:spLocks xmlns:a="http://schemas.openxmlformats.org/drawingml/2006/main" noGrp="1"/>
+          </p:cNvSpPr>
+          <p:nvPr/>
+        </p:nvSpPr>
+        <p:spPr>
+          <a:xfrm xmlns:a="http://schemas.openxmlformats.org/drawingml/2006/main">
+            <a:off x="6372225" y="2419350"/>
+            <a:ext cx="381000" cy="381000"/>
+          </a:xfrm>
+          <a:prstGeom xmlns:a="http://schemas.openxmlformats.org/drawingml/2006/main" prst="ellipse">
+            <a:avLst/>
+          </a:prstGeom>
+          <a:solidFill xmlns:a="http://schemas.openxmlformats.org/drawingml/2006/main">
+            <a:srgbClr val="FFFFFF"/>
+          </a:solidFill>
+          <a:ln xmlns:a="http://schemas.openxmlformats.org/drawingml/2006/main" w="0">
+            <a:noFill/>
+          </a:ln>
+        </p:spPr>
+      </p:sp>
+      <p:sp>
+        <p:nvSpPr>
+          <p:cNvPr id="13" name="">
+            <a:extLst xmlns:a="http://schemas.openxmlformats.org/drawingml/2006/main">
+              <a:ext uri="{FF2B5EF4-FFF2-40B4-BE49-F238E27FC236}">
+                <a16:creationId xmlns:a16="http://schemas.microsoft.com/office/drawing/2014/main" id="{45E6810B-5A82-4B77-885F-8AD07570F222}"/>
+              </a:ext>
+            </a:extLst>
+          </p:cNvPr>
+          <p:cNvSpPr>
+            <a:spLocks xmlns:a="http://schemas.openxmlformats.org/drawingml/2006/main" noGrp="1"/>
+          </p:cNvSpPr>
+          <p:nvPr/>
+        </p:nvSpPr>
+        <p:spPr>
+          <a:xfrm xmlns:a="http://schemas.openxmlformats.org/drawingml/2006/main">
+            <a:off x="6429375" y="2486025"/>
+            <a:ext cx="342900" cy="285750"/>
+          </a:xfrm>
+          <a:prstGeom xmlns:a="http://schemas.openxmlformats.org/drawingml/2006/main" prst="rect">
+            <a:avLst/>
+          </a:prstGeom>
+          <a:noFill xmlns:a="http://schemas.openxmlformats.org/drawingml/2006/main"/>
+          <a:ln xmlns:a="http://schemas.openxmlformats.org/drawingml/2006/main" w="0">
+            <a:noFill/>
+          </a:ln>
+        </p:spPr>
+        <p:txBody>
+          <a:bodyPr xmlns:a="http://schemas.openxmlformats.org/drawingml/2006/main" lIns="0" tIns="0" rIns="0" bIns="0" anchor="t">
+            <a:noAutofit/>
+          </a:bodyPr>
+          <a:lstStyle xmlns:a="http://schemas.openxmlformats.org/drawingml/2006/main"/>
+          <a:p xmlns:a="http://schemas.openxmlformats.org/drawingml/2006/main">
+            <a:pPr>
+              <a:defRPr sz="1350" b="1">
+                <a:solidFill>
+                  <a:srgbClr val="263C3A"/>
+                </a:solidFill>
+                <a:latin typeface="DejaVu Sans"/>
+                <a:ea typeface="DejaVu Sans"/>
+                <a:cs typeface="DejaVu Sans"/>
+              </a:defRPr>
+            </a:pPr>
+            <a:r>
+              <a:rPr sz="1350" b="1">
+                <a:solidFill>
+                  <a:srgbClr val="263C3A"/>
+                </a:solidFill>
+                <a:latin typeface="DejaVu Sans"/>
+                <a:ea typeface="DejaVu Sans"/>
+                <a:cs typeface="DejaVu Sans"/>
+              </a:rPr>
+              <a:t>02</a:t>
+            </a:r>
+          </a:p>
+        </p:txBody>
+      </p:sp>
+      <p:sp>
+        <p:nvSpPr>
+          <p:cNvPr id="14" name="">
+            <a:extLst xmlns:a="http://schemas.openxmlformats.org/drawingml/2006/main">
+              <a:ext uri="{FF2B5EF4-FFF2-40B4-BE49-F238E27FC236}">
+                <a16:creationId xmlns:a16="http://schemas.microsoft.com/office/drawing/2014/main" id="{5648A33D-3826-44A7-A2C1-98E06C5EFE3A}"/>
+              </a:ext>
+            </a:extLst>
+          </p:cNvPr>
+          <p:cNvSpPr>
+            <a:spLocks xmlns:a="http://schemas.openxmlformats.org/drawingml/2006/main" noGrp="1"/>
+          </p:cNvSpPr>
+          <p:nvPr/>
+        </p:nvSpPr>
+        <p:spPr>
+          <a:xfrm xmlns:a="http://schemas.openxmlformats.org/drawingml/2006/main">
+            <a:off x="6924675" y="2466975"/>
+            <a:ext cx="4467225" cy="428625"/>
+          </a:xfrm>
+          <a:prstGeom xmlns:a="http://schemas.openxmlformats.org/drawingml/2006/main" prst="rect">
+            <a:avLst/>
+          </a:prstGeom>
+          <a:noFill xmlns:a="http://schemas.openxmlformats.org/drawingml/2006/main"/>
+          <a:ln xmlns:a="http://schemas.openxmlformats.org/drawingml/2006/main" w="0">
+            <a:noFill/>
+          </a:ln>
+        </p:spPr>
+        <p:txBody>
+          <a:bodyPr xmlns:a="http://schemas.openxmlformats.org/drawingml/2006/main" lIns="0" tIns="0" rIns="0" bIns="0" anchor="t">
+            <a:noAutofit/>
+          </a:bodyPr>
+          <a:lstStyle xmlns:a="http://schemas.openxmlformats.org/drawingml/2006/main"/>
+          <a:p xmlns:a="http://schemas.openxmlformats.org/drawingml/2006/main">
+            <a:pPr>
+              <a:defRPr sz="1725" b="1">
+                <a:solidFill>
+                  <a:srgbClr val="263C3A"/>
+                </a:solidFill>
+                <a:latin typeface="DejaVu Sans"/>
+                <a:ea typeface="DejaVu Sans"/>
+                <a:cs typeface="DejaVu Sans"/>
+              </a:defRPr>
+            </a:pPr>
+            <a:r>
+              <a:rPr sz="1725" b="1">
+                <a:solidFill>
+                  <a:srgbClr val="263C3A"/>
+                </a:solidFill>
+                <a:latin typeface="DejaVu Sans"/>
+                <a:ea typeface="DejaVu Sans"/>
+                <a:cs typeface="DejaVu Sans"/>
+              </a:rPr>
+              <a:t>Explain what you remember</a:t>
+            </a:r>
+          </a:p>
+        </p:txBody>
+      </p:sp>
+      <p:sp>
+        <p:nvSpPr>
+          <p:cNvPr id="15" name="">
+            <a:extLst xmlns:a="http://schemas.openxmlformats.org/drawingml/2006/main">
+              <a:ext uri="{FF2B5EF4-FFF2-40B4-BE49-F238E27FC236}">
+                <a16:creationId xmlns:a16="http://schemas.microsoft.com/office/drawing/2014/main" id="{2A136234-71C7-41C8-9400-3A184B0B49CE}"/>
+              </a:ext>
+            </a:extLst>
+          </p:cNvPr>
+          <p:cNvSpPr>
+            <a:spLocks xmlns:a="http://schemas.openxmlformats.org/drawingml/2006/main" noGrp="1"/>
+          </p:cNvSpPr>
+          <p:nvPr/>
+        </p:nvSpPr>
+        <p:spPr>
+          <a:xfrm xmlns:a="http://schemas.openxmlformats.org/drawingml/2006/main">
+            <a:off x="6391275" y="2990850"/>
+            <a:ext cx="4981575" cy="2466975"/>
+          </a:xfrm>
+          <a:prstGeom xmlns:a="http://schemas.openxmlformats.org/drawingml/2006/main" prst="rect">
+            <a:avLst/>
+          </a:prstGeom>
+          <a:noFill xmlns:a="http://schemas.openxmlformats.org/drawingml/2006/main"/>
+          <a:ln xmlns:a="http://schemas.openxmlformats.org/drawingml/2006/main" w="0">
+            <a:noFill/>
+          </a:ln>
+        </p:spPr>
+        <p:txBody>
+          <a:bodyPr xmlns:a="http://schemas.openxmlformats.org/drawingml/2006/main" lIns="0" tIns="0" rIns="0" bIns="0" anchor="t">
+            <a:noAutofit/>
+          </a:bodyPr>
+          <a:lstStyle xmlns:a="http://schemas.openxmlformats.org/drawingml/2006/main"/>
+          <a:p xmlns:a="http://schemas.openxmlformats.org/drawingml/2006/main">
+            <a:pPr>
+              <a:defRPr sz="1950" b="0">
+                <a:solidFill>
+                  <a:srgbClr val="687572"/>
+                </a:solidFill>
+                <a:latin typeface="DejaVu Sans"/>
+                <a:ea typeface="DejaVu Sans"/>
+                <a:cs typeface="DejaVu Sans"/>
+              </a:defRPr>
+            </a:pPr>
+            <a:r>
+              <a:rPr sz="1950" b="0">
+                <a:solidFill>
+                  <a:srgbClr val="687572"/>
+                </a:solidFill>
+                <a:latin typeface="DejaVu Sans"/>
+                <a:ea typeface="DejaVu Sans"/>
+                <a:cs typeface="DejaVu Sans"/>
+              </a:rPr>
+              <a:t>[Your recall instructions]</a:t>
+            </a:r>
+          </a:p>
+        </p:txBody>
+      </p:sp>
+      <p:sp>
+        <p:nvSpPr>
+          <p:cNvPr id="16" name="">
+            <a:extLst xmlns:a="http://schemas.openxmlformats.org/drawingml/2006/main">
+              <a:ext uri="{FF2B5EF4-FFF2-40B4-BE49-F238E27FC236}">
+                <a16:creationId xmlns:a16="http://schemas.microsoft.com/office/drawing/2014/main" id="{7BCA4CE0-BBA1-4FF7-B186-1CB8DEC9AD83}"/>
+              </a:ext>
+            </a:extLst>
+          </p:cNvPr>
+          <p:cNvSpPr>
+            <a:spLocks xmlns:a="http://schemas.openxmlformats.org/drawingml/2006/main" noGrp="1"/>
+          </p:cNvSpPr>
+          <p:nvPr/>
+        </p:nvSpPr>
+        <p:spPr>
+          <a:xfrm xmlns:a="http://schemas.openxmlformats.org/drawingml/2006/main">
+            <a:off x="609600" y="5953125"/>
+            <a:ext cx="10972800" cy="9525"/>
+          </a:xfrm>
+          <a:prstGeom xmlns:a="http://schemas.openxmlformats.org/drawingml/2006/main" prst="rect">
+            <a:avLst/>
+          </a:prstGeom>
+          <a:solidFill xmlns:a="http://schemas.openxmlformats.org/drawingml/2006/main">
+            <a:srgbClr val="A9BDB7"/>
+          </a:solidFill>
+          <a:ln xmlns:a="http://schemas.openxmlformats.org/drawingml/2006/main" w="0">
+            <a:noFill/>
+          </a:ln>
+        </p:spPr>
+      </p:sp>
+      <p:sp>
+        <p:nvSpPr>
+          <p:cNvPr id="17" name="">
+            <a:extLst xmlns:a="http://schemas.openxmlformats.org/drawingml/2006/main">
+              <a:ext uri="{FF2B5EF4-FFF2-40B4-BE49-F238E27FC236}">
+                <a16:creationId xmlns:a16="http://schemas.microsoft.com/office/drawing/2014/main" id="{0BF3DE26-5D97-4020-80AE-9BBFA02E7CDD}"/>
+              </a:ext>
+            </a:extLst>
+          </p:cNvPr>
+          <p:cNvSpPr>
+            <a:spLocks xmlns:a="http://schemas.openxmlformats.org/drawingml/2006/main" noGrp="1"/>
+          </p:cNvSpPr>
+          <p:nvPr/>
+        </p:nvSpPr>
+        <p:spPr>
+          <a:xfrm xmlns:a="http://schemas.openxmlformats.org/drawingml/2006/main">
+            <a:off x="609600" y="6191250"/>
+            <a:ext cx="3238500" cy="361950"/>
+          </a:xfrm>
+          <a:prstGeom xmlns:a="http://schemas.openxmlformats.org/drawingml/2006/main" prst="rect">
+            <a:avLst/>
+          </a:prstGeom>
+          <a:noFill xmlns:a="http://schemas.openxmlformats.org/drawingml/2006/main"/>
+          <a:ln xmlns:a="http://schemas.openxmlformats.org/drawingml/2006/main" w="0">
+            <a:noFill/>
+          </a:ln>
+        </p:spPr>
+        <p:txBody>
+          <a:bodyPr xmlns:a="http://schemas.openxmlformats.org/drawingml/2006/main" lIns="0" tIns="0" rIns="0" bIns="0" anchor="t">
+            <a:noAutofit/>
+          </a:bodyPr>
+          <a:lstStyle xmlns:a="http://schemas.openxmlformats.org/drawingml/2006/main"/>
+          <a:p xmlns:a="http://schemas.openxmlformats.org/drawingml/2006/main">
+            <a:pPr>
+              <a:defRPr sz="1650" b="0">
+                <a:solidFill>
+                  <a:srgbClr val="687572"/>
+                </a:solidFill>
+                <a:latin typeface="DejaVu Sans"/>
+                <a:ea typeface="DejaVu Sans"/>
+                <a:cs typeface="DejaVu Sans"/>
+              </a:defRPr>
+            </a:pPr>
+            <a:r>
+              <a:rPr sz="1650" b="0">
+                <a:solidFill>
+                  <a:srgbClr val="687572"/>
+                </a:solidFill>
+                <a:latin typeface="DejaVu Sans"/>
+                <a:ea typeface="DejaVu Sans"/>
+                <a:cs typeface="DejaVu Sans"/>
+              </a:rPr>
+              <a:t>Time: [Minutes]</a:t>
+            </a:r>
+          </a:p>
+        </p:txBody>
+      </p:sp>
+      <p:sp>
+        <p:nvSpPr>
+          <p:cNvPr id="18" name="">
+            <a:extLst xmlns:a="http://schemas.openxmlformats.org/drawingml/2006/main">
+              <a:ext uri="{FF2B5EF4-FFF2-40B4-BE49-F238E27FC236}">
+                <a16:creationId xmlns:a16="http://schemas.microsoft.com/office/drawing/2014/main" id="{966B5F8D-E0AF-436D-98DE-610405666EF2}"/>
+              </a:ext>
+            </a:extLst>
+          </p:cNvPr>
+          <p:cNvSpPr>
+            <a:spLocks xmlns:a="http://schemas.openxmlformats.org/drawingml/2006/main" noGrp="1"/>
+          </p:cNvSpPr>
+          <p:nvPr/>
+        </p:nvSpPr>
+        <p:spPr>
+          <a:xfrm xmlns:a="http://schemas.openxmlformats.org/drawingml/2006/main">
+            <a:off x="4286250" y="6191250"/>
+            <a:ext cx="7296150" cy="361950"/>
+          </a:xfrm>
+          <a:prstGeom xmlns:a="http://schemas.openxmlformats.org/drawingml/2006/main" prst="rect">
+            <a:avLst/>
+          </a:prstGeom>
+          <a:noFill xmlns:a="http://schemas.openxmlformats.org/drawingml/2006/main"/>
+          <a:ln xmlns:a="http://schemas.openxmlformats.org/drawingml/2006/main" w="0">
+            <a:noFill/>
+          </a:ln>
+        </p:spPr>
+        <p:txBody>
+          <a:bodyPr xmlns:a="http://schemas.openxmlformats.org/drawingml/2006/main" lIns="0" tIns="0" rIns="0" bIns="0" anchor="t">
+            <a:noAutofit/>
+          </a:bodyPr>
+          <a:lstStyle xmlns:a="http://schemas.openxmlformats.org/drawingml/2006/main"/>
+          <a:p xmlns:a="http://schemas.openxmlformats.org/drawingml/2006/main">
+            <a:pPr>
+              <a:defRPr sz="1650" b="0">
+                <a:solidFill>
+                  <a:srgbClr val="687572"/>
+                </a:solidFill>
+                <a:latin typeface="DejaVu Sans"/>
+                <a:ea typeface="DejaVu Sans"/>
+                <a:cs typeface="DejaVu Sans"/>
+              </a:defRPr>
+            </a:pPr>
+            <a:r>
+              <a:rPr sz="1650" b="0">
+                <a:solidFill>
+                  <a:srgbClr val="687572"/>
+                </a:solidFill>
+                <a:latin typeface="DejaVu Sans"/>
+                <a:ea typeface="DejaVu Sans"/>
+                <a:cs typeface="DejaVu Sans"/>
+              </a:rPr>
+              <a:t>Feedback: [Your checking routine]</a:t>
+            </a:r>
+          </a:p>
+        </p:txBody>
+      </p:sp>
     </p:spTree>
     <p:extLst>
       <p:ext uri="{BB962C8B-B14F-4D97-AF65-F5344CB8AC3E}">
-        <p14:creationId xmlns:p14="http://schemas.microsoft.com/office/powerpoint/2010/main" val="479555553"/>
+        <p14:creationId xmlns:p14="http://schemas.microsoft.com/office/powerpoint/2010/main" val="1157739510"/>
       </p:ext>
     </p:extLst>
   </p:cSld>
